--- a/lecons/F4/16_F4_M1_L16_The_Vegetation_of_Cameroon.pptx
+++ b/lecons/F4/16_F4_M1_L16_The_Vegetation_of_Cameroon.pptx
@@ -12757,7 +12757,7 @@
               <a:buNone/>
             </a:pPr>
             <a:r>
-              <a:rPr lang="en-US" sz="4000" b="1" dirty="0">
+              <a:rPr lang="en-US" sz="3200" b="1" dirty="0">
                 <a:solidFill>
                   <a:srgbClr val="111111"/>
                 </a:solidFill>
@@ -12767,7 +12767,7 @@
               </a:rPr>
               <a:t>Topic: The Physical Geography of Cameroon</a:t>
             </a:r>
-            <a:endParaRPr lang="en-US" sz="4000" dirty="0"/>
+            <a:endParaRPr lang="en-US" sz="3200" dirty="0"/>
           </a:p>
           <a:p>
             <a:pPr algn="l" indent="0" marL="0">
@@ -12777,7 +12777,7 @@
               <a:buNone/>
             </a:pPr>
             <a:r>
-              <a:rPr lang="en-US" sz="4000" b="1" dirty="0">
+              <a:rPr lang="en-US" sz="3200" b="1" dirty="0">
                 <a:solidFill>
                   <a:srgbClr val="111111"/>
                 </a:solidFill>
@@ -12787,7 +12787,7 @@
               </a:rPr>
               <a:t>Sub-topic: The Bio-geographical Characteristics of Cameroon</a:t>
             </a:r>
-            <a:endParaRPr lang="en-US" sz="4000" dirty="0"/>
+            <a:endParaRPr lang="en-US" sz="3200" dirty="0"/>
           </a:p>
           <a:p>
             <a:pPr algn="l" indent="0" marL="0">
@@ -12797,7 +12797,7 @@
               <a:buNone/>
             </a:pPr>
             <a:r>
-              <a:rPr lang="en-US" sz="4000" b="1" dirty="0">
+              <a:rPr lang="en-US" sz="3200" b="1" dirty="0">
                 <a:solidFill>
                   <a:srgbClr val="990011"/>
                 </a:solidFill>
@@ -12807,7 +12807,7 @@
               </a:rPr>
               <a:t>Lesson 16: The Vegetation of Cameroon</a:t>
             </a:r>
-            <a:endParaRPr lang="en-US" sz="4000" dirty="0"/>
+            <a:endParaRPr lang="en-US" sz="3200" dirty="0"/>
           </a:p>
         </p:txBody>
       </p:sp>
